--- a/public/fun/pack/pptx/newspro/카드뉴스프리미엄_04_감사·칭찬_화이트골드.pptx
+++ b/public/fun/pack/pptx/newspro/카드뉴스프리미엄_04_감사·칭찬_화이트골드.pptx
@@ -113,12 +113,12 @@
   <p:extLst>
     <p:ext uri="{521415D9-36F7-43E2-AB2F-B90AF26B5E84}">
       <p14:sectionLst xmlns:p14="http://schemas.microsoft.com/office/powerpoint/2010/main">
-        <p14:section name="시작" id="{8F9663DC-5F2E-49D6-B315-B421B1779210}">
+        <p14:section name="시작" id="{9919CD19-67D0-4797-A188-58D79E376105}">
           <p14:sldIdLst>
             <p14:sldId id="256"/>
           </p14:sldIdLst>
         </p14:section>
-        <p14:section name="본문" id="{2270AA92-3171-4559-94A2-62AF9DCE7D58}">
+        <p14:section name="본문" id="{1244D2B9-114F-4209-83FC-95587E14FC0F}">
           <p14:sldIdLst>
             <p14:sldId id="257"/>
             <p14:sldId id="258"/>
@@ -127,7 +127,7 @@
             <p14:sldId id="261"/>
           </p14:sldIdLst>
         </p14:section>
-        <p14:section name="마무리" id="{3275B57F-88F7-4FD5-8750-4B676C223B6D}">
+        <p14:section name="마무리" id="{89BAF539-5F38-4476-B5CE-EFFB2B44F7FA}">
           <p14:sldIdLst>
             <p14:sldId id="262"/>
           </p14:sldIdLst>
@@ -1968,7 +1968,7 @@
             </a:lvl1pPr>
           </a:lstStyle>
           <a:p>
-            <a:fld id="{6FAD290E-60B4-42D5-A9EF-235402F82724}" type="slidenum">
+            <a:fld id="{05C01608-E106-445C-9118-4DDEE1A40B28}" type="slidenum">
               <a:rPr lang="en-US"/>
               <a:t>‹#›</a:t>
             </a:fld>
@@ -3398,7 +3398,7 @@
             </a:lvl1pPr>
           </a:lstStyle>
           <a:p>
-            <a:fld id="{A5F50C23-38EA-4ACA-99C5-91B7AF2846F5}" type="slidenum">
+            <a:fld id="{8B2413C9-0017-4C10-8834-C0D460B5F921}" type="slidenum">
               <a:rPr lang="en-US"/>
               <a:t>‹#›</a:t>
             </a:fld>
@@ -4408,7 +4408,7 @@
             </a:lvl1pPr>
           </a:lstStyle>
           <a:p>
-            <a:fld id="{D9A8AB25-2097-4E32-835B-A2B524D58C2F}" type="slidenum">
+            <a:fld id="{826106EF-4E10-45A4-B5D5-5B0CFBDEE68F}" type="slidenum">
               <a:rPr lang="en-US"/>
               <a:t>‹#›</a:t>
             </a:fld>
@@ -5656,7 +5656,7 @@
           <a:bodyPr/>
           <a:lstStyle/>
           <a:p>
-            <a:fld id="{348D4377-853D-4285-9584-CB88D7E09FC8}" type="slidenum">
+            <a:fld id="{6F1D91E9-8AE2-4057-B0D8-9055FFF5D1C9}" type="slidenum">
               <a:rPr lang="en-US"/>
               <a:t>‹#›</a:t>
             </a:fld>
@@ -5822,7 +5822,7 @@
           <a:bodyPr/>
           <a:lstStyle/>
           <a:p>
-            <a:fld id="{833933B6-C950-400A-9050-A88C1253CD29}" type="slidenum">
+            <a:fld id="{E8E0FC26-08FA-4CE8-B57C-D4E870DAB365}" type="slidenum">
               <a:rPr lang="en-US"/>
               <a:t>‹#›</a:t>
             </a:fld>
@@ -5988,7 +5988,7 @@
           <a:bodyPr/>
           <a:lstStyle/>
           <a:p>
-            <a:fld id="{FCEB17F9-778B-4A1F-B252-3E2DC1B1CA3F}" type="slidenum">
+            <a:fld id="{DB87E151-9484-4A93-B2BB-F8485D74C916}" type="slidenum">
               <a:rPr lang="en-US"/>
               <a:t>‹#›</a:t>
             </a:fld>
@@ -6154,7 +6154,7 @@
           <a:bodyPr/>
           <a:lstStyle/>
           <a:p>
-            <a:fld id="{96F9E072-9805-4197-B4EF-D1405A88F4EB}" type="slidenum">
+            <a:fld id="{629D210F-F68B-4788-9D8E-09271E9E5536}" type="slidenum">
               <a:rPr lang="en-US"/>
               <a:t>‹#›</a:t>
             </a:fld>
@@ -6320,7 +6320,7 @@
           <a:bodyPr/>
           <a:lstStyle/>
           <a:p>
-            <a:fld id="{6E7E2651-0F42-4E83-9283-79AFB6C50101}" type="slidenum">
+            <a:fld id="{3CC77E5F-D0C1-4DD0-8859-5DB8DA2A77DA}" type="slidenum">
               <a:rPr lang="en-US"/>
               <a:t>‹#›</a:t>
             </a:fld>
